--- a/projects/drug-information-practical/slides/ch05-protocol-hypothesis-ethics.pptx
+++ b/projects/drug-information-practical/slides/ch05-protocol-hypothesis-ethics.pptx
@@ -19979,7 +19979,7 @@
                     <a:lstStyle/>
                     <a:p>
                       <a:r>
-                        <a:rPr sz="1400" i="0" b="1">
+                        <a:rPr sz="1700" i="0" b="1">
                           <a:solidFill>
                             <a:srgbClr val="FFFFFF"/>
                           </a:solidFill>
@@ -20001,7 +20001,7 @@
                     <a:lstStyle/>
                     <a:p>
                       <a:r>
-                        <a:rPr sz="1400" i="0" b="1">
+                        <a:rPr sz="1700" i="0" b="1">
                           <a:solidFill>
                             <a:srgbClr val="FFFFFF"/>
                           </a:solidFill>
@@ -20025,7 +20025,7 @@
                     <a:lstStyle/>
                     <a:p>
                       <a:r>
-                        <a:rPr sz="1500" i="0" b="1">
+                        <a:rPr sz="1800" i="0" b="1">
                           <a:solidFill>
                             <a:srgbClr val="2B211C"/>
                           </a:solidFill>
@@ -20047,7 +20047,7 @@
                     <a:lstStyle/>
                     <a:p>
                       <a:r>
-                        <a:rPr sz="1500" i="0" b="0">
+                        <a:rPr sz="1800" i="0" b="0">
                           <a:solidFill>
                             <a:srgbClr val="2B211C"/>
                           </a:solidFill>
@@ -20071,7 +20071,7 @@
                     <a:lstStyle/>
                     <a:p>
                       <a:r>
-                        <a:rPr sz="1500" i="0" b="1">
+                        <a:rPr sz="1800" i="0" b="1">
                           <a:solidFill>
                             <a:srgbClr val="2B211C"/>
                           </a:solidFill>
@@ -20093,7 +20093,7 @@
                     <a:lstStyle/>
                     <a:p>
                       <a:r>
-                        <a:rPr sz="1500" i="0" b="0">
+                        <a:rPr sz="1800" i="0" b="0">
                           <a:solidFill>
                             <a:srgbClr val="2B211C"/>
                           </a:solidFill>
@@ -20117,7 +20117,7 @@
                     <a:lstStyle/>
                     <a:p>
                       <a:r>
-                        <a:rPr sz="1500" i="0" b="1">
+                        <a:rPr sz="1800" i="0" b="1">
                           <a:solidFill>
                             <a:srgbClr val="2B211C"/>
                           </a:solidFill>
@@ -20139,7 +20139,7 @@
                     <a:lstStyle/>
                     <a:p>
                       <a:r>
-                        <a:rPr sz="1500" i="0" b="0">
+                        <a:rPr sz="1800" i="0" b="0">
                           <a:solidFill>
                             <a:srgbClr val="2B211C"/>
                           </a:solidFill>
@@ -20163,7 +20163,7 @@
                     <a:lstStyle/>
                     <a:p>
                       <a:r>
-                        <a:rPr sz="1500" i="0" b="1">
+                        <a:rPr sz="1800" i="0" b="1">
                           <a:solidFill>
                             <a:srgbClr val="2B211C"/>
                           </a:solidFill>
@@ -20185,7 +20185,7 @@
                     <a:lstStyle/>
                     <a:p>
                       <a:r>
-                        <a:rPr sz="1500" i="0" b="0">
+                        <a:rPr sz="1800" i="0" b="0">
                           <a:solidFill>
                             <a:srgbClr val="2B211C"/>
                           </a:solidFill>
@@ -20209,7 +20209,7 @@
                     <a:lstStyle/>
                     <a:p>
                       <a:r>
-                        <a:rPr sz="1500" i="0" b="1">
+                        <a:rPr sz="1800" i="0" b="1">
                           <a:solidFill>
                             <a:srgbClr val="2B211C"/>
                           </a:solidFill>
@@ -20231,7 +20231,7 @@
                     <a:lstStyle/>
                     <a:p>
                       <a:r>
-                        <a:rPr sz="1500" i="0" b="0">
+                        <a:rPr sz="1800" i="0" b="0">
                           <a:solidFill>
                             <a:srgbClr val="2B211C"/>
                           </a:solidFill>
@@ -20255,7 +20255,7 @@
                     <a:lstStyle/>
                     <a:p>
                       <a:r>
-                        <a:rPr sz="1500" i="0" b="1">
+                        <a:rPr sz="1800" i="0" b="1">
                           <a:solidFill>
                             <a:srgbClr val="2B211C"/>
                           </a:solidFill>
@@ -20277,7 +20277,7 @@
                     <a:lstStyle/>
                     <a:p>
                       <a:r>
-                        <a:rPr sz="1500" i="0" b="0">
+                        <a:rPr sz="1800" i="0" b="0">
                           <a:solidFill>
                             <a:srgbClr val="2B211C"/>
                           </a:solidFill>
@@ -20301,7 +20301,7 @@
                     <a:lstStyle/>
                     <a:p>
                       <a:r>
-                        <a:rPr sz="1500" i="0" b="1">
+                        <a:rPr sz="1800" i="0" b="1">
                           <a:solidFill>
                             <a:srgbClr val="2B211C"/>
                           </a:solidFill>
@@ -20323,7 +20323,7 @@
                     <a:lstStyle/>
                     <a:p>
                       <a:r>
-                        <a:rPr sz="1500" i="0" b="0">
+                        <a:rPr sz="1800" i="0" b="0">
                           <a:solidFill>
                             <a:srgbClr val="2B211C"/>
                           </a:solidFill>

--- a/projects/drug-information-practical/slides/ch05-protocol-hypothesis-ethics.pptx
+++ b/projects/drug-information-practical/slides/ch05-protocol-hypothesis-ethics.pptx
@@ -5795,7 +5795,7 @@
     <p:bg>
       <p:bgPr>
         <a:solidFill>
-          <a:srgbClr val="FFFFFF"/>
+          <a:srgbClr val="F5EDE3"/>
         </a:solidFill>
         <a:effectLst/>
       </p:bgPr>
@@ -6302,7 +6302,7 @@
     <p:bg>
       <p:bgPr>
         <a:solidFill>
-          <a:srgbClr val="FFFFFF"/>
+          <a:srgbClr val="F5EDE3"/>
         </a:solidFill>
         <a:effectLst/>
       </p:bgPr>
@@ -6658,7 +6658,7 @@
     <p:bg>
       <p:bgPr>
         <a:solidFill>
-          <a:srgbClr val="FFFFFF"/>
+          <a:srgbClr val="F5EDE3"/>
         </a:solidFill>
         <a:effectLst/>
       </p:bgPr>
@@ -7292,7 +7292,7 @@
     <p:bg>
       <p:bgPr>
         <a:solidFill>
-          <a:srgbClr val="FFFFFF"/>
+          <a:srgbClr val="F5EDE3"/>
         </a:solidFill>
         <a:effectLst/>
       </p:bgPr>
@@ -7650,7 +7650,7 @@
     <p:bg>
       <p:bgPr>
         <a:solidFill>
-          <a:srgbClr val="FFFFFF"/>
+          <a:srgbClr val="F5EDE3"/>
         </a:solidFill>
         <a:effectLst/>
       </p:bgPr>
@@ -8078,7 +8078,7 @@
     <p:bg>
       <p:bgPr>
         <a:solidFill>
-          <a:srgbClr val="FFFFFF"/>
+          <a:srgbClr val="F5EDE3"/>
         </a:solidFill>
         <a:effectLst/>
       </p:bgPr>
@@ -8624,7 +8624,7 @@
     <p:bg>
       <p:bgPr>
         <a:solidFill>
-          <a:srgbClr val="FFFFFF"/>
+          <a:srgbClr val="F5EDE3"/>
         </a:solidFill>
         <a:effectLst/>
       </p:bgPr>
@@ -8900,7 +8900,7 @@
     <p:bg>
       <p:bgPr>
         <a:solidFill>
-          <a:srgbClr val="FFFFFF"/>
+          <a:srgbClr val="F5EDE3"/>
         </a:solidFill>
         <a:effectLst/>
       </p:bgPr>
@@ -9706,7 +9706,7 @@
     <p:bg>
       <p:bgPr>
         <a:solidFill>
-          <a:srgbClr val="FFFFFF"/>
+          <a:srgbClr val="F5EDE3"/>
         </a:solidFill>
         <a:effectLst/>
       </p:bgPr>
@@ -10555,7 +10555,7 @@
     <p:bg>
       <p:bgPr>
         <a:solidFill>
-          <a:srgbClr val="FFFFFF"/>
+          <a:srgbClr val="F5EDE3"/>
         </a:solidFill>
         <a:effectLst/>
       </p:bgPr>
@@ -11361,7 +11361,7 @@
     <p:bg>
       <p:bgPr>
         <a:solidFill>
-          <a:srgbClr val="FFFFFF"/>
+          <a:srgbClr val="F5EDE3"/>
         </a:solidFill>
         <a:effectLst/>
       </p:bgPr>
@@ -12186,7 +12186,7 @@
     <p:bg>
       <p:bgPr>
         <a:solidFill>
-          <a:srgbClr val="FFFFFF"/>
+          <a:srgbClr val="F5EDE3"/>
         </a:solidFill>
         <a:effectLst/>
       </p:bgPr>
@@ -13035,7 +13035,7 @@
     <p:bg>
       <p:bgPr>
         <a:solidFill>
-          <a:srgbClr val="FFFFFF"/>
+          <a:srgbClr val="F5EDE3"/>
         </a:solidFill>
         <a:effectLst/>
       </p:bgPr>
@@ -13841,7 +13841,7 @@
     <p:bg>
       <p:bgPr>
         <a:solidFill>
-          <a:srgbClr val="FFFFFF"/>
+          <a:srgbClr val="F5EDE3"/>
         </a:solidFill>
         <a:effectLst/>
       </p:bgPr>
@@ -14690,7 +14690,7 @@
     <p:bg>
       <p:bgPr>
         <a:solidFill>
-          <a:srgbClr val="FFFFFF"/>
+          <a:srgbClr val="F5EDE3"/>
         </a:solidFill>
         <a:effectLst/>
       </p:bgPr>
@@ -15496,7 +15496,7 @@
     <p:bg>
       <p:bgPr>
         <a:solidFill>
-          <a:srgbClr val="FFFFFF"/>
+          <a:srgbClr val="F5EDE3"/>
         </a:solidFill>
         <a:effectLst/>
       </p:bgPr>
@@ -16345,7 +16345,7 @@
     <p:bg>
       <p:bgPr>
         <a:solidFill>
-          <a:srgbClr val="FFFFFF"/>
+          <a:srgbClr val="F5EDE3"/>
         </a:solidFill>
         <a:effectLst/>
       </p:bgPr>
@@ -17151,7 +17151,7 @@
     <p:bg>
       <p:bgPr>
         <a:solidFill>
-          <a:srgbClr val="FFFFFF"/>
+          <a:srgbClr val="F5EDE3"/>
         </a:solidFill>
         <a:effectLst/>
       </p:bgPr>
@@ -18000,7 +18000,7 @@
     <p:bg>
       <p:bgPr>
         <a:solidFill>
-          <a:srgbClr val="FFFFFF"/>
+          <a:srgbClr val="F5EDE3"/>
         </a:solidFill>
         <a:effectLst/>
       </p:bgPr>
@@ -18853,7 +18853,7 @@
     <p:bg>
       <p:bgPr>
         <a:solidFill>
-          <a:srgbClr val="FFFFFF"/>
+          <a:srgbClr val="F5EDE3"/>
         </a:solidFill>
         <a:effectLst/>
       </p:bgPr>
@@ -19615,7 +19615,7 @@
     <p:bg>
       <p:bgPr>
         <a:solidFill>
-          <a:srgbClr val="FFFFFF"/>
+          <a:srgbClr val="F5EDE3"/>
         </a:solidFill>
         <a:effectLst/>
       </p:bgPr>
@@ -20358,7 +20358,7 @@
     <p:bg>
       <p:bgPr>
         <a:solidFill>
-          <a:srgbClr val="FFFFFF"/>
+          <a:srgbClr val="F5EDE3"/>
         </a:solidFill>
         <a:effectLst/>
       </p:bgPr>
@@ -20762,7 +20762,7 @@
     <p:bg>
       <p:bgPr>
         <a:solidFill>
-          <a:srgbClr val="FFFFFF"/>
+          <a:srgbClr val="F5EDE3"/>
         </a:solidFill>
         <a:effectLst/>
       </p:bgPr>
@@ -21339,7 +21339,7 @@
     <p:bg>
       <p:bgPr>
         <a:solidFill>
-          <a:srgbClr val="FFFFFF"/>
+          <a:srgbClr val="F5EDE3"/>
         </a:solidFill>
         <a:effectLst/>
       </p:bgPr>
@@ -21818,7 +21818,7 @@
     <p:bg>
       <p:bgPr>
         <a:solidFill>
-          <a:srgbClr val="FFFFFF"/>
+          <a:srgbClr val="F5EDE3"/>
         </a:solidFill>
         <a:effectLst/>
       </p:bgPr>
@@ -22457,7 +22457,7 @@
     <p:bg>
       <p:bgPr>
         <a:solidFill>
-          <a:srgbClr val="FFFFFF"/>
+          <a:srgbClr val="F5EDE3"/>
         </a:solidFill>
         <a:effectLst/>
       </p:bgPr>
